--- a/deck/Notch-Bullet-Kickoff.pptx
+++ b/deck/Notch-Bullet-Kickoff.pptx
@@ -9225,7 +9225,7 @@
                 <a:ea typeface="Calibri" pitchFamily="34" charset="-122"/>
                 <a:cs typeface="Calibri" pitchFamily="34" charset="-120"/>
               </a:rPr>
-              <a:t>THE BENCHMARK WE DEFEND</a:t>
+              <a:t>NOTCH TARGET</a:t>
             </a:r>
             <a:endParaRPr lang="en-US" sz="1100" dirty="0"/>
           </a:p>

--- a/deck/Notch-Bullet-Kickoff.pptx
+++ b/deck/Notch-Bullet-Kickoff.pptx
@@ -2258,7 +2258,7 @@
                 <a:ea typeface="Calibri" pitchFamily="34" charset="-122"/>
                 <a:cs typeface="Calibri" pitchFamily="34" charset="-120"/>
               </a:rPr>
-              <a:t>WhatsApp MVP</a:t>
+              <a:t>WhatsApp V0</a:t>
             </a:r>
             <a:endParaRPr lang="en-US" sz="1250" dirty="0"/>
           </a:p>
@@ -6720,7 +6720,7 @@
                 <a:ea typeface="Calibri" pitchFamily="34" charset="-122"/>
                 <a:cs typeface="Calibri" pitchFamily="34" charset="-120"/>
               </a:rPr>
-              <a:t>First three weeks &amp; owners</a:t>
+              <a:t>First four weeks &amp; owners</a:t>
             </a:r>
             <a:endParaRPr lang="en-US" sz="1250" dirty="0"/>
           </a:p>
@@ -11503,8 +11503,8 @@
         </p:nvSpPr>
         <p:spPr>
           <a:xfrm>
-            <a:off x="1725930" y="3749040"/>
-            <a:ext cx="434340" cy="274320"/>
+            <a:off x="1648206" y="3749040"/>
+            <a:ext cx="589788" cy="274320"/>
           </a:xfrm>
           <a:prstGeom prst="roundRect">
             <a:avLst>
@@ -11525,8 +11525,8 @@
         </p:nvSpPr>
         <p:spPr>
           <a:xfrm>
-            <a:off x="1725930" y="3749040"/>
-            <a:ext cx="434340" cy="274320"/>
+            <a:off x="1648206" y="3749040"/>
+            <a:ext cx="589788" cy="274320"/>
           </a:xfrm>
           <a:prstGeom prst="rect">
             <a:avLst/>
@@ -11550,7 +11550,7 @@
                 <a:ea typeface="Calibri" pitchFamily="34" charset="-122"/>
                 <a:cs typeface="Calibri" pitchFamily="34" charset="-120"/>
               </a:rPr>
-              <a:t>MVP</a:t>
+              <a:t>Pilot</a:t>
             </a:r>
             <a:endParaRPr lang="en-US" sz="950" dirty="0"/>
           </a:p>
